--- a/PPT/dotNet12-TDD.pptx
+++ b/PPT/dotNet12-TDD.pptx
@@ -9380,7 +9380,15 @@
             <a:pPr lvl="1"/>
             <a:r>
               <a:rPr lang="fr-FR" sz="2000" dirty="0"/>
-              <a:t>Un test d’intégration dépends des couches sous jacentes</a:t>
+              <a:t>Un test </a:t>
+            </a:r>
+            <a:r>
+              <a:rPr lang="fr-FR" sz="2000"/>
+              <a:t>d’intégration dépend </a:t>
+            </a:r>
+            <a:r>
+              <a:rPr lang="fr-FR" sz="2000" dirty="0"/>
+              <a:t>des couches sous jacentes</a:t>
             </a:r>
           </a:p>
           <a:p>
